--- a/courseware/202609_ADS_W02_VM_Shell_DevEnv.pptx
+++ b/courseware/202609_ADS_W02_VM_Shell_DevEnv.pptx
@@ -7178,7 +7178,7 @@
                 <a:latin typeface="Segoe UI"/>
                 <a:ea typeface="微软雅黑"/>
               </a:rPr>
-              <a:t>Python 虚拟环境</a:t>
+              <a:t>Python 虚拟环境（uv）</a:t>
             </a:r>
           </a:p>
         </p:txBody>
@@ -7314,7 +7314,7 @@
                 <a:latin typeface="Consolas"/>
                 <a:ea typeface="Consolas"/>
               </a:rPr>
-              <a:t>python3 -m venv .venv                 # 创建</a:t>
+              <a:t>uv python install 3.14 --default     # 安装 Python（由 uv 管理）</a:t>
             </a:r>
           </a:p>
           <a:p>
@@ -7337,7 +7337,7 @@
                 <a:latin typeface="Consolas"/>
                 <a:ea typeface="Consolas"/>
               </a:rPr>
-              <a:t>source .venv/bin/activate             # 启用（macOS / Linux）</a:t>
+              <a:t>uv init --no-package MyPython        # 新建项目（--no-package 不能省）</a:t>
             </a:r>
           </a:p>
           <a:p>
@@ -7360,7 +7360,7 @@
                 <a:latin typeface="Consolas"/>
                 <a:ea typeface="Consolas"/>
               </a:rPr>
-              <a:t>.venv\Scripts\activate                # 启用（Windows PowerShell）</a:t>
+              <a:t>cd MyPython</a:t>
             </a:r>
           </a:p>
           <a:p>
@@ -7383,7 +7383,7 @@
                 <a:latin typeface="Consolas"/>
                 <a:ea typeface="Consolas"/>
               </a:rPr>
-              <a:t>pip install numpy matplotlib          # 装包，只影响这个环境</a:t>
+              <a:t>uv add numpy matplotlib              # 装包，写入 pyproject.toml / uv.lock</a:t>
             </a:r>
           </a:p>
           <a:p>
@@ -7406,7 +7406,7 @@
                 <a:latin typeface="Consolas"/>
                 <a:ea typeface="Consolas"/>
               </a:rPr>
-              <a:t>pip freeze &gt; requirements.txt         # 导出依赖</a:t>
+              <a:t>uv run main.py                       # 运行，自动使用 .venv，无需 activate</a:t>
             </a:r>
           </a:p>
           <a:p>
@@ -7429,7 +7429,7 @@
                 <a:latin typeface="Consolas"/>
                 <a:ea typeface="Consolas"/>
               </a:rPr>
-              <a:t>deactivate                            # 退出</a:t>
+              <a:t>uv remove numpy                      # 卸载包</a:t>
             </a:r>
           </a:p>
           <a:p>
@@ -7452,7 +7452,7 @@
                 <a:latin typeface="Consolas"/>
                 <a:ea typeface="Consolas"/>
               </a:rPr>
-              <a:t> </a:t>
+              <a:t># 环境坏了 / 换了电脑：删掉 .venv 重建</a:t>
             </a:r>
           </a:p>
           <a:p>
@@ -7475,7 +7475,7 @@
                 <a:latin typeface="Consolas"/>
                 <a:ea typeface="Consolas"/>
               </a:rPr>
-              <a:t># Windows 若提示无法运行脚本：</a:t>
+              <a:t>rm -rf .venv &amp;&amp; uv sync                      # macOS / Linux</a:t>
             </a:r>
           </a:p>
           <a:p>
@@ -7498,7 +7498,7 @@
                 <a:latin typeface="Consolas"/>
                 <a:ea typeface="Consolas"/>
               </a:rPr>
-              <a:t># Set-ExecutionPolicy -Scope CurrentUser -ExecutionPolicy RemoteSigned</a:t>
+              <a:t>Remove-Item -Recurse -Force .venv; uv sync   # Windows PowerShell</a:t>
             </a:r>
           </a:p>
         </p:txBody>
@@ -7541,7 +7541,7 @@
                 <a:latin typeface="Segoe UI"/>
                 <a:ea typeface="微软雅黑"/>
               </a:rPr>
-              <a:t>不同项目依赖不同版本的包，虚拟环境把它们隔离开</a:t>
+              <a:t>虚拟环境隔离不同项目的包；uv 一个工具管好 Python 版本、.venv 和第三方包</a:t>
             </a:r>
           </a:p>
         </p:txBody>

--- a/courseware/202609_ADS_W02_VM_Shell_DevEnv.pptx
+++ b/courseware/202609_ADS_W02_VM_Shell_DevEnv.pptx
@@ -6029,7 +6029,7 @@
         <p:spPr>
           <a:xfrm>
             <a:off x="566928" y="1298448"/>
-            <a:ext cx="11057839" cy="2838450"/>
+            <a:ext cx="11057839" cy="3094355"/>
           </a:xfrm>
           <a:prstGeom prst="rect">
             <a:avLst/>
@@ -6075,7 +6075,7 @@
         <p:spPr>
           <a:xfrm>
             <a:off x="822960" y="1399032"/>
-            <a:ext cx="10545775" cy="2637282"/>
+            <a:ext cx="10545775" cy="2893187"/>
           </a:xfrm>
           <a:prstGeom prst="rect">
             <a:avLst/>
@@ -6107,7 +6107,7 @@
                 <a:latin typeface="Consolas"/>
                 <a:ea typeface="Consolas"/>
               </a:rPr>
-              <a:t>ssh -p &lt;端口&gt; &lt;用户名&gt;@&lt;课程IP&gt;   # 直接复制节点卡片上自己的完整命令</a:t>
+              <a:t># 直接复制节点卡片上自己的完整命令</a:t>
             </a:r>
           </a:p>
           <a:p>
@@ -6130,7 +6130,7 @@
                 <a:latin typeface="Consolas"/>
                 <a:ea typeface="Consolas"/>
               </a:rPr>
-              <a:t># Are you sure ...?  输入 yes 回车；出现远程提示符 = 连接成功</a:t>
+              <a:t>ssh -p &lt;端口&gt; &lt;用户名&gt;@&lt;课程IP&gt;</a:t>
             </a:r>
           </a:p>
           <a:p>
@@ -6153,7 +6153,7 @@
                 <a:latin typeface="Consolas"/>
                 <a:ea typeface="Consolas"/>
               </a:rPr>
-              <a:t> </a:t>
+              <a:t># Are you sure ...?  输入 yes 回车；出现远程提示符 = 连接成功</a:t>
             </a:r>
           </a:p>
           <a:p>
@@ -6176,7 +6176,7 @@
                 <a:latin typeface="Consolas"/>
                 <a:ea typeface="Consolas"/>
               </a:rPr>
-              <a:t>whoami                            # 当前用户</a:t>
+              <a:t> </a:t>
             </a:r>
           </a:p>
           <a:p>
@@ -6199,7 +6199,7 @@
                 <a:latin typeface="Consolas"/>
                 <a:ea typeface="Consolas"/>
               </a:rPr>
-              <a:t>pwd                               # 当前目录</a:t>
+              <a:t>whoami                            # 当前用户</a:t>
             </a:r>
           </a:p>
           <a:p>
@@ -6222,7 +6222,7 @@
                 <a:latin typeface="Consolas"/>
                 <a:ea typeface="Consolas"/>
               </a:rPr>
-              <a:t>uname -m                          # CPU 架构</a:t>
+              <a:t>pwd                               # 当前目录</a:t>
             </a:r>
           </a:p>
           <a:p>
@@ -6245,7 +6245,7 @@
                 <a:latin typeface="Consolas"/>
                 <a:ea typeface="Consolas"/>
               </a:rPr>
-              <a:t>mkdir -p ~/ic-b-2026/xlab-intro-demo</a:t>
+              <a:t>uname -m                          # CPU 架构</a:t>
             </a:r>
           </a:p>
           <a:p>
@@ -6268,7 +6268,7 @@
                 <a:latin typeface="Consolas"/>
                 <a:ea typeface="Consolas"/>
               </a:rPr>
-              <a:t>cd ~/ic-b-2026/xlab-intro-demo</a:t>
+              <a:t>mkdir -p ~/ic-b-2026/xlab-intro-demo</a:t>
             </a:r>
           </a:p>
           <a:p>
@@ -6291,7 +6291,7 @@
                 <a:latin typeface="Consolas"/>
                 <a:ea typeface="Consolas"/>
               </a:rPr>
-              <a:t>ls</a:t>
+              <a:t>cd ~/ic-b-2026/xlab-intro-demo</a:t>
             </a:r>
           </a:p>
           <a:p>
@@ -6314,6 +6314,29 @@
                 <a:latin typeface="Consolas"/>
                 <a:ea typeface="Consolas"/>
               </a:rPr>
+              <a:t>ls</a:t>
+            </a:r>
+          </a:p>
+          <a:p>
+            <a:pPr algn="l">
+              <a:lnSpc>
+                <a:spcPts val="2015"/>
+              </a:lnSpc>
+              <a:spcBef>
+                <a:spcPts val="0"/>
+              </a:spcBef>
+              <a:spcAft>
+                <a:spcPts val="0"/>
+              </a:spcAft>
+            </a:pPr>
+            <a:r>
+              <a:rPr sz="1550" b="0" i="0">
+                <a:solidFill>
+                  <a:srgbClr val="242A33"/>
+                </a:solidFill>
+                <a:latin typeface="Consolas"/>
+                <a:ea typeface="Consolas"/>
+              </a:rPr>
               <a:t>exit                              # 退出 SSH，回到本机终端</a:t>
             </a:r>
           </a:p>
@@ -6327,7 +6350,7 @@
         </p:nvSpPr>
         <p:spPr>
           <a:xfrm>
-            <a:off x="566928" y="4255770"/>
+            <a:off x="566928" y="4511675"/>
             <a:ext cx="11057839" cy="329184"/>
           </a:xfrm>
           <a:prstGeom prst="rect">
@@ -25506,7 +25529,7 @@
                 <a:latin typeface="Consolas"/>
                 <a:ea typeface="Consolas"/>
               </a:rPr>
-              <a:t>scp user@ip:~/result.txt ./        #          云主机 -&gt; 本机</a:t>
+              <a:t>scp user@ip:~/result.txt ./        #    反向：云主机 -&gt; 本机</a:t>
             </a:r>
           </a:p>
         </p:txBody>
